--- a/SASE/MITRE_ATTACK.pptx
+++ b/SASE/MITRE_ATTACK.pptx
@@ -19,6 +19,10 @@
     <p:sldId id="268" r:id="rId13"/>
     <p:sldId id="269" r:id="rId14"/>
     <p:sldId id="270" r:id="rId15"/>
+    <p:sldId id="271" r:id="rId16"/>
+    <p:sldId id="272" r:id="rId17"/>
+    <p:sldId id="273" r:id="rId18"/>
+    <p:sldId id="274" r:id="rId19"/>
   </p:sldIdLst>
   <p:sldSz cx="6858000" cy="10007600"/>
   <p:notesSz cx="6858000" cy="9144000"/>
@@ -3464,7 +3468,7 @@
             <a:ext cx="6858000" cy="845820"/>
           </a:xfrm>
           <a:solidFill>
-            <a:schemeClr val="accent1"/>
+            <a:schemeClr val="accent2"/>
           </a:solidFill>
         </p:spPr>
         <p:txBody>
@@ -4279,6 +4283,859 @@
     <p:extLst>
       <p:ext uri="{BB962C8B-B14F-4D97-AF65-F5344CB8AC3E}">
         <p14:creationId xmlns:p14="http://schemas.microsoft.com/office/powerpoint/2010/main" val="2490749675"/>
+      </p:ext>
+    </p:extLst>
+  </p:cSld>
+  <p:clrMapOvr>
+    <a:masterClrMapping/>
+  </p:clrMapOvr>
+</p:sld>
+</file>
+
+<file path=ppt/slides/slide15.xml><?xml version="1.0" encoding="utf-8"?>
+<p:sld xmlns:a="http://schemas.openxmlformats.org/drawingml/2006/main" xmlns:r="http://schemas.openxmlformats.org/officeDocument/2006/relationships" xmlns:p="http://schemas.openxmlformats.org/presentationml/2006/main">
+  <p:cSld>
+    <p:spTree>
+      <p:nvGrpSpPr>
+        <p:cNvPr id="1" name="">
+          <a:extLst>
+            <a:ext uri="{FF2B5EF4-FFF2-40B4-BE49-F238E27FC236}">
+              <a16:creationId xmlns:a16="http://schemas.microsoft.com/office/drawing/2014/main" id="{DD3DE903-5D68-4C76-3D08-9401CCDB7643}"/>
+            </a:ext>
+          </a:extLst>
+        </p:cNvPr>
+        <p:cNvGrpSpPr/>
+        <p:nvPr/>
+      </p:nvGrpSpPr>
+      <p:grpSpPr>
+        <a:xfrm>
+          <a:off x="0" y="0"/>
+          <a:ext cx="0" cy="0"/>
+          <a:chOff x="0" y="0"/>
+          <a:chExt cx="0" cy="0"/>
+        </a:xfrm>
+      </p:grpSpPr>
+      <p:sp>
+        <p:nvSpPr>
+          <p:cNvPr id="4" name="Title 3">
+            <a:extLst>
+              <a:ext uri="{FF2B5EF4-FFF2-40B4-BE49-F238E27FC236}">
+                <a16:creationId xmlns:a16="http://schemas.microsoft.com/office/drawing/2014/main" id="{7C821A1D-A0E7-B694-E44D-9073A21584CB}"/>
+              </a:ext>
+            </a:extLst>
+          </p:cNvPr>
+          <p:cNvSpPr>
+            <a:spLocks noGrp="1"/>
+          </p:cNvSpPr>
+          <p:nvPr>
+            <p:ph type="title"/>
+          </p:nvPr>
+        </p:nvSpPr>
+        <p:spPr>
+          <a:xfrm>
+            <a:off x="0" y="0"/>
+            <a:ext cx="6858000" cy="845820"/>
+          </a:xfrm>
+          <a:solidFill>
+            <a:schemeClr val="accent1"/>
+          </a:solidFill>
+        </p:spPr>
+        <p:txBody>
+          <a:bodyPr>
+            <a:normAutofit/>
+          </a:bodyPr>
+          <a:lstStyle/>
+          <a:p>
+            <a:pPr algn="ctr"/>
+            <a:r>
+              <a:rPr lang="en-US" b="1" dirty="0">
+                <a:solidFill>
+                  <a:schemeClr val="bg1"/>
+                </a:solidFill>
+              </a:rPr>
+              <a:t>PURPLE TEAMING</a:t>
+            </a:r>
+          </a:p>
+        </p:txBody>
+      </p:sp>
+      <p:sp>
+        <p:nvSpPr>
+          <p:cNvPr id="5" name="TextBox 4">
+            <a:extLst>
+              <a:ext uri="{FF2B5EF4-FFF2-40B4-BE49-F238E27FC236}">
+                <a16:creationId xmlns:a16="http://schemas.microsoft.com/office/drawing/2014/main" id="{7346FF75-1F2A-76D2-D011-4217E36F2AD7}"/>
+              </a:ext>
+            </a:extLst>
+          </p:cNvPr>
+          <p:cNvSpPr txBox="1"/>
+          <p:nvPr/>
+        </p:nvSpPr>
+        <p:spPr>
+          <a:xfrm>
+            <a:off x="0" y="845820"/>
+            <a:ext cx="6858000" cy="646331"/>
+          </a:xfrm>
+          <a:prstGeom prst="rect">
+            <a:avLst/>
+          </a:prstGeom>
+          <a:noFill/>
+        </p:spPr>
+        <p:txBody>
+          <a:bodyPr wrap="square" rtlCol="0">
+            <a:spAutoFit/>
+          </a:bodyPr>
+          <a:lstStyle/>
+          <a:p>
+            <a:r>
+              <a:rPr lang="en-US" dirty="0"/>
+              <a:t>Blue and Red Team collab to improve security posture</a:t>
+            </a:r>
+          </a:p>
+          <a:p>
+            <a:endParaRPr lang="en-US" dirty="0"/>
+          </a:p>
+        </p:txBody>
+      </p:sp>
+      <p:pic>
+        <p:nvPicPr>
+          <p:cNvPr id="3" name="Picture 2">
+            <a:extLst>
+              <a:ext uri="{FF2B5EF4-FFF2-40B4-BE49-F238E27FC236}">
+                <a16:creationId xmlns:a16="http://schemas.microsoft.com/office/drawing/2014/main" id="{C1C04E89-4031-4761-EB6C-EA4AF2AECD1C}"/>
+              </a:ext>
+            </a:extLst>
+          </p:cNvPr>
+          <p:cNvPicPr>
+            <a:picLocks noChangeAspect="1"/>
+          </p:cNvPicPr>
+          <p:nvPr/>
+        </p:nvPicPr>
+        <p:blipFill>
+          <a:blip r:embed="rId2"/>
+          <a:srcRect t="18921"/>
+          <a:stretch>
+            <a:fillRect/>
+          </a:stretch>
+        </p:blipFill>
+        <p:spPr>
+          <a:xfrm>
+            <a:off x="350134" y="1319513"/>
+            <a:ext cx="6157732" cy="2502648"/>
+          </a:xfrm>
+          <a:prstGeom prst="rect">
+            <a:avLst/>
+          </a:prstGeom>
+        </p:spPr>
+      </p:pic>
+    </p:spTree>
+    <p:extLst>
+      <p:ext uri="{BB962C8B-B14F-4D97-AF65-F5344CB8AC3E}">
+        <p14:creationId xmlns:p14="http://schemas.microsoft.com/office/powerpoint/2010/main" val="1072195517"/>
+      </p:ext>
+    </p:extLst>
+  </p:cSld>
+  <p:clrMapOvr>
+    <a:masterClrMapping/>
+  </p:clrMapOvr>
+</p:sld>
+</file>
+
+<file path=ppt/slides/slide16.xml><?xml version="1.0" encoding="utf-8"?>
+<p:sld xmlns:a="http://schemas.openxmlformats.org/drawingml/2006/main" xmlns:r="http://schemas.openxmlformats.org/officeDocument/2006/relationships" xmlns:p="http://schemas.openxmlformats.org/presentationml/2006/main">
+  <p:cSld>
+    <p:spTree>
+      <p:nvGrpSpPr>
+        <p:cNvPr id="1" name="">
+          <a:extLst>
+            <a:ext uri="{FF2B5EF4-FFF2-40B4-BE49-F238E27FC236}">
+              <a16:creationId xmlns:a16="http://schemas.microsoft.com/office/drawing/2014/main" id="{82BD3D29-365B-7E4A-32C3-29E4C238390D}"/>
+            </a:ext>
+          </a:extLst>
+        </p:cNvPr>
+        <p:cNvGrpSpPr/>
+        <p:nvPr/>
+      </p:nvGrpSpPr>
+      <p:grpSpPr>
+        <a:xfrm>
+          <a:off x="0" y="0"/>
+          <a:ext cx="0" cy="0"/>
+          <a:chOff x="0" y="0"/>
+          <a:chExt cx="0" cy="0"/>
+        </a:xfrm>
+      </p:grpSpPr>
+      <p:sp>
+        <p:nvSpPr>
+          <p:cNvPr id="4" name="Title 3">
+            <a:extLst>
+              <a:ext uri="{FF2B5EF4-FFF2-40B4-BE49-F238E27FC236}">
+                <a16:creationId xmlns:a16="http://schemas.microsoft.com/office/drawing/2014/main" id="{7AD415D3-6B07-079C-041C-7BE74F99E84E}"/>
+              </a:ext>
+            </a:extLst>
+          </p:cNvPr>
+          <p:cNvSpPr>
+            <a:spLocks noGrp="1"/>
+          </p:cNvSpPr>
+          <p:nvPr>
+            <p:ph type="title"/>
+          </p:nvPr>
+        </p:nvSpPr>
+        <p:spPr>
+          <a:xfrm>
+            <a:off x="0" y="0"/>
+            <a:ext cx="6858000" cy="845820"/>
+          </a:xfrm>
+          <a:solidFill>
+            <a:schemeClr val="accent1"/>
+          </a:solidFill>
+        </p:spPr>
+        <p:txBody>
+          <a:bodyPr>
+            <a:normAutofit/>
+          </a:bodyPr>
+          <a:lstStyle/>
+          <a:p>
+            <a:pPr algn="ctr"/>
+            <a:r>
+              <a:rPr lang="en-US" b="1" dirty="0">
+                <a:solidFill>
+                  <a:schemeClr val="bg1"/>
+                </a:solidFill>
+              </a:rPr>
+              <a:t>THREAT</a:t>
+            </a:r>
+          </a:p>
+        </p:txBody>
+      </p:sp>
+      <p:pic>
+        <p:nvPicPr>
+          <p:cNvPr id="7" name="Picture 6">
+            <a:extLst>
+              <a:ext uri="{FF2B5EF4-FFF2-40B4-BE49-F238E27FC236}">
+                <a16:creationId xmlns:a16="http://schemas.microsoft.com/office/drawing/2014/main" id="{558E7DC2-4A7E-C29A-92ED-89658AD95FC0}"/>
+              </a:ext>
+            </a:extLst>
+          </p:cNvPr>
+          <p:cNvPicPr>
+            <a:picLocks noChangeAspect="1"/>
+          </p:cNvPicPr>
+          <p:nvPr/>
+        </p:nvPicPr>
+        <p:blipFill>
+          <a:blip r:embed="rId2"/>
+          <a:stretch>
+            <a:fillRect/>
+          </a:stretch>
+        </p:blipFill>
+        <p:spPr>
+          <a:xfrm>
+            <a:off x="133809" y="958525"/>
+            <a:ext cx="6590382" cy="1177970"/>
+          </a:xfrm>
+          <a:prstGeom prst="rect">
+            <a:avLst/>
+          </a:prstGeom>
+        </p:spPr>
+      </p:pic>
+      <p:sp>
+        <p:nvSpPr>
+          <p:cNvPr id="2" name="Title 3">
+            <a:extLst>
+              <a:ext uri="{FF2B5EF4-FFF2-40B4-BE49-F238E27FC236}">
+                <a16:creationId xmlns:a16="http://schemas.microsoft.com/office/drawing/2014/main" id="{D7CF368B-38B4-A97F-8887-5895CB723221}"/>
+              </a:ext>
+            </a:extLst>
+          </p:cNvPr>
+          <p:cNvSpPr txBox="1">
+            <a:spLocks/>
+          </p:cNvSpPr>
+          <p:nvPr/>
+        </p:nvSpPr>
+        <p:spPr>
+          <a:xfrm>
+            <a:off x="0" y="2283928"/>
+            <a:ext cx="6858000" cy="973198"/>
+          </a:xfrm>
+          <a:prstGeom prst="rect">
+            <a:avLst/>
+          </a:prstGeom>
+          <a:solidFill>
+            <a:schemeClr val="accent1"/>
+          </a:solidFill>
+        </p:spPr>
+        <p:txBody>
+          <a:bodyPr vert="horz" lIns="91440" tIns="45720" rIns="91440" bIns="45720" rtlCol="0" anchor="ctr">
+            <a:normAutofit lnSpcReduction="10000"/>
+          </a:bodyPr>
+          <a:lstStyle>
+            <a:lvl1pPr algn="l" defTabSz="685800" rtl="0" eaLnBrk="1" latinLnBrk="0" hangingPunct="1">
+              <a:lnSpc>
+                <a:spcPct val="90000"/>
+              </a:lnSpc>
+              <a:spcBef>
+                <a:spcPct val="0"/>
+              </a:spcBef>
+              <a:buNone/>
+              <a:defRPr sz="3300" kern="1200">
+                <a:solidFill>
+                  <a:schemeClr val="tx1"/>
+                </a:solidFill>
+                <a:latin typeface="+mj-lt"/>
+                <a:ea typeface="+mj-ea"/>
+                <a:cs typeface="+mj-cs"/>
+              </a:defRPr>
+            </a:lvl1pPr>
+          </a:lstStyle>
+          <a:p>
+            <a:pPr algn="ctr"/>
+            <a:r>
+              <a:rPr lang="en-US" b="1" dirty="0">
+                <a:solidFill>
+                  <a:schemeClr val="bg1"/>
+                </a:solidFill>
+              </a:rPr>
+              <a:t>INTELLIGENCE, THREAT INTELLIGENCE, AND CTI</a:t>
+            </a:r>
+          </a:p>
+        </p:txBody>
+      </p:sp>
+      <p:pic>
+        <p:nvPicPr>
+          <p:cNvPr id="8" name="Picture 7">
+            <a:extLst>
+              <a:ext uri="{FF2B5EF4-FFF2-40B4-BE49-F238E27FC236}">
+                <a16:creationId xmlns:a16="http://schemas.microsoft.com/office/drawing/2014/main" id="{1146465C-571F-1A31-AA76-48BAC077481E}"/>
+              </a:ext>
+            </a:extLst>
+          </p:cNvPr>
+          <p:cNvPicPr>
+            <a:picLocks noChangeAspect="1"/>
+          </p:cNvPicPr>
+          <p:nvPr/>
+        </p:nvPicPr>
+        <p:blipFill>
+          <a:blip r:embed="rId3"/>
+          <a:srcRect b="1622"/>
+          <a:stretch>
+            <a:fillRect/>
+          </a:stretch>
+        </p:blipFill>
+        <p:spPr>
+          <a:xfrm>
+            <a:off x="310579" y="3389254"/>
+            <a:ext cx="6236841" cy="2648028"/>
+          </a:xfrm>
+          <a:prstGeom prst="rect">
+            <a:avLst/>
+          </a:prstGeom>
+        </p:spPr>
+      </p:pic>
+      <p:sp>
+        <p:nvSpPr>
+          <p:cNvPr id="9" name="TextBox 8">
+            <a:extLst>
+              <a:ext uri="{FF2B5EF4-FFF2-40B4-BE49-F238E27FC236}">
+                <a16:creationId xmlns:a16="http://schemas.microsoft.com/office/drawing/2014/main" id="{6438B21C-10CC-EB3E-586B-F9DE6063816E}"/>
+              </a:ext>
+            </a:extLst>
+          </p:cNvPr>
+          <p:cNvSpPr txBox="1"/>
+          <p:nvPr/>
+        </p:nvSpPr>
+        <p:spPr>
+          <a:xfrm>
+            <a:off x="0" y="6037282"/>
+            <a:ext cx="6858000" cy="3970318"/>
+          </a:xfrm>
+          <a:prstGeom prst="rect">
+            <a:avLst/>
+          </a:prstGeom>
+          <a:noFill/>
+        </p:spPr>
+        <p:txBody>
+          <a:bodyPr wrap="square" rtlCol="0">
+            <a:spAutoFit/>
+          </a:bodyPr>
+          <a:lstStyle/>
+          <a:p>
+            <a:pPr algn="just"/>
+            <a:r>
+              <a:rPr lang="en-US" b="1" dirty="0"/>
+              <a:t>Intelligence: </a:t>
+            </a:r>
+            <a:r>
+              <a:rPr lang="en-US" dirty="0"/>
+              <a:t>It is a very broad term.</a:t>
+            </a:r>
+          </a:p>
+          <a:p>
+            <a:pPr algn="just"/>
+            <a:r>
+              <a:rPr lang="en-US" dirty="0"/>
+              <a:t>It means collecting, analyzing, and using information to understand situations and make decisions.</a:t>
+            </a:r>
+          </a:p>
+          <a:p>
+            <a:pPr algn="just"/>
+            <a:r>
+              <a:rPr lang="en-US" b="1" dirty="0"/>
+              <a:t>Threat Intelligence:</a:t>
+            </a:r>
+            <a:r>
+              <a:rPr lang="en-US" dirty="0"/>
+              <a:t> Threat specifically, we talk about specific adversaries, specific threat actors that exist out there in the wild, and we talk about tactics, techniques, and procedures that they leverage, still this doesn’t need to be connected to cyber security, meaning there are a lot of threat actors out there that do bad things by leveraging certain tactics, techniques, and procedures that are not connected at all to cyber security.</a:t>
+            </a:r>
+          </a:p>
+          <a:p>
+            <a:pPr algn="just"/>
+            <a:r>
+              <a:rPr lang="en-US" b="1" dirty="0"/>
+              <a:t>Cyber Threat Intelligence:</a:t>
+            </a:r>
+            <a:r>
+              <a:rPr lang="en-US" dirty="0"/>
+              <a:t> We really talk about adversary threat actors that leverage tactics which are in fact leveraging cyber security. So, if you have nation state sponsored hacking group that executes certain operations and leverages TTPs, this is Cyber Threat Intelligence</a:t>
+            </a:r>
+          </a:p>
+        </p:txBody>
+      </p:sp>
+    </p:spTree>
+    <p:extLst>
+      <p:ext uri="{BB962C8B-B14F-4D97-AF65-F5344CB8AC3E}">
+        <p14:creationId xmlns:p14="http://schemas.microsoft.com/office/powerpoint/2010/main" val="990948348"/>
+      </p:ext>
+    </p:extLst>
+  </p:cSld>
+  <p:clrMapOvr>
+    <a:masterClrMapping/>
+  </p:clrMapOvr>
+</p:sld>
+</file>
+
+<file path=ppt/slides/slide17.xml><?xml version="1.0" encoding="utf-8"?>
+<p:sld xmlns:a="http://schemas.openxmlformats.org/drawingml/2006/main" xmlns:r="http://schemas.openxmlformats.org/officeDocument/2006/relationships" xmlns:p="http://schemas.openxmlformats.org/presentationml/2006/main">
+  <p:cSld>
+    <p:spTree>
+      <p:nvGrpSpPr>
+        <p:cNvPr id="1" name="">
+          <a:extLst>
+            <a:ext uri="{FF2B5EF4-FFF2-40B4-BE49-F238E27FC236}">
+              <a16:creationId xmlns:a16="http://schemas.microsoft.com/office/drawing/2014/main" id="{F2D358A9-A997-2F7E-9D24-F8BB6288DBB5}"/>
+            </a:ext>
+          </a:extLst>
+        </p:cNvPr>
+        <p:cNvGrpSpPr/>
+        <p:nvPr/>
+      </p:nvGrpSpPr>
+      <p:grpSpPr>
+        <a:xfrm>
+          <a:off x="0" y="0"/>
+          <a:ext cx="0" cy="0"/>
+          <a:chOff x="0" y="0"/>
+          <a:chExt cx="0" cy="0"/>
+        </a:xfrm>
+      </p:grpSpPr>
+      <p:sp>
+        <p:nvSpPr>
+          <p:cNvPr id="4" name="Title 3">
+            <a:extLst>
+              <a:ext uri="{FF2B5EF4-FFF2-40B4-BE49-F238E27FC236}">
+                <a16:creationId xmlns:a16="http://schemas.microsoft.com/office/drawing/2014/main" id="{78C0C74E-A356-A340-B740-0117C8084606}"/>
+              </a:ext>
+            </a:extLst>
+          </p:cNvPr>
+          <p:cNvSpPr>
+            <a:spLocks noGrp="1"/>
+          </p:cNvSpPr>
+          <p:nvPr>
+            <p:ph type="title"/>
+          </p:nvPr>
+        </p:nvSpPr>
+        <p:spPr>
+          <a:xfrm>
+            <a:off x="0" y="0"/>
+            <a:ext cx="6858000" cy="845820"/>
+          </a:xfrm>
+          <a:solidFill>
+            <a:schemeClr val="accent1"/>
+          </a:solidFill>
+        </p:spPr>
+        <p:txBody>
+          <a:bodyPr>
+            <a:normAutofit/>
+          </a:bodyPr>
+          <a:lstStyle/>
+          <a:p>
+            <a:pPr algn="ctr"/>
+            <a:r>
+              <a:rPr lang="en-US" sz="3100" b="1" dirty="0">
+                <a:solidFill>
+                  <a:schemeClr val="bg1"/>
+                </a:solidFill>
+              </a:rPr>
+              <a:t>CYBER THREAT INTELLIGENCE</a:t>
+            </a:r>
+          </a:p>
+        </p:txBody>
+      </p:sp>
+      <p:pic>
+        <p:nvPicPr>
+          <p:cNvPr id="5" name="Picture 4">
+            <a:extLst>
+              <a:ext uri="{FF2B5EF4-FFF2-40B4-BE49-F238E27FC236}">
+                <a16:creationId xmlns:a16="http://schemas.microsoft.com/office/drawing/2014/main" id="{99FF2E19-6249-CB89-FAD4-8A878F212B3C}"/>
+              </a:ext>
+            </a:extLst>
+          </p:cNvPr>
+          <p:cNvPicPr>
+            <a:picLocks noChangeAspect="1"/>
+          </p:cNvPicPr>
+          <p:nvPr/>
+        </p:nvPicPr>
+        <p:blipFill>
+          <a:blip r:embed="rId2"/>
+          <a:stretch>
+            <a:fillRect/>
+          </a:stretch>
+        </p:blipFill>
+        <p:spPr>
+          <a:xfrm>
+            <a:off x="89235" y="901957"/>
+            <a:ext cx="6679529" cy="1574157"/>
+          </a:xfrm>
+          <a:prstGeom prst="rect">
+            <a:avLst/>
+          </a:prstGeom>
+        </p:spPr>
+      </p:pic>
+      <p:sp>
+        <p:nvSpPr>
+          <p:cNvPr id="6" name="Title 3">
+            <a:extLst>
+              <a:ext uri="{FF2B5EF4-FFF2-40B4-BE49-F238E27FC236}">
+                <a16:creationId xmlns:a16="http://schemas.microsoft.com/office/drawing/2014/main" id="{6D081898-BB96-2ED7-1419-6F060E9ACAD4}"/>
+              </a:ext>
+            </a:extLst>
+          </p:cNvPr>
+          <p:cNvSpPr txBox="1">
+            <a:spLocks/>
+          </p:cNvSpPr>
+          <p:nvPr/>
+        </p:nvSpPr>
+        <p:spPr>
+          <a:xfrm>
+            <a:off x="-1" y="2710405"/>
+            <a:ext cx="6858000" cy="845820"/>
+          </a:xfrm>
+          <a:prstGeom prst="rect">
+            <a:avLst/>
+          </a:prstGeom>
+          <a:solidFill>
+            <a:schemeClr val="accent1"/>
+          </a:solidFill>
+        </p:spPr>
+        <p:txBody>
+          <a:bodyPr vert="horz" lIns="91440" tIns="45720" rIns="91440" bIns="45720" rtlCol="0" anchor="ctr">
+            <a:normAutofit fontScale="92500"/>
+          </a:bodyPr>
+          <a:lstStyle>
+            <a:lvl1pPr algn="l" defTabSz="685800" rtl="0" eaLnBrk="1" latinLnBrk="0" hangingPunct="1">
+              <a:lnSpc>
+                <a:spcPct val="90000"/>
+              </a:lnSpc>
+              <a:spcBef>
+                <a:spcPct val="0"/>
+              </a:spcBef>
+              <a:buNone/>
+              <a:defRPr sz="3300" kern="1200">
+                <a:solidFill>
+                  <a:schemeClr val="tx1"/>
+                </a:solidFill>
+                <a:latin typeface="+mj-lt"/>
+                <a:ea typeface="+mj-ea"/>
+                <a:cs typeface="+mj-cs"/>
+              </a:defRPr>
+            </a:lvl1pPr>
+          </a:lstStyle>
+          <a:p>
+            <a:pPr algn="ctr"/>
+            <a:r>
+              <a:rPr lang="en-US" b="1" dirty="0">
+                <a:solidFill>
+                  <a:schemeClr val="bg1"/>
+                </a:solidFill>
+              </a:rPr>
+              <a:t>THREATS, VULNERABILITIES, AND ATTACKS</a:t>
+            </a:r>
+          </a:p>
+        </p:txBody>
+      </p:sp>
+      <p:pic>
+        <p:nvPicPr>
+          <p:cNvPr id="13" name="Picture 12">
+            <a:extLst>
+              <a:ext uri="{FF2B5EF4-FFF2-40B4-BE49-F238E27FC236}">
+                <a16:creationId xmlns:a16="http://schemas.microsoft.com/office/drawing/2014/main" id="{82D50EE3-19A7-02F5-2EE6-BC41917AA4BE}"/>
+              </a:ext>
+            </a:extLst>
+          </p:cNvPr>
+          <p:cNvPicPr>
+            <a:picLocks noChangeAspect="1"/>
+          </p:cNvPicPr>
+          <p:nvPr/>
+        </p:nvPicPr>
+        <p:blipFill>
+          <a:blip r:embed="rId3"/>
+          <a:stretch>
+            <a:fillRect/>
+          </a:stretch>
+        </p:blipFill>
+        <p:spPr>
+          <a:xfrm>
+            <a:off x="200308" y="3710265"/>
+            <a:ext cx="6457381" cy="2587070"/>
+          </a:xfrm>
+          <a:prstGeom prst="rect">
+            <a:avLst/>
+          </a:prstGeom>
+        </p:spPr>
+      </p:pic>
+    </p:spTree>
+    <p:extLst>
+      <p:ext uri="{BB962C8B-B14F-4D97-AF65-F5344CB8AC3E}">
+        <p14:creationId xmlns:p14="http://schemas.microsoft.com/office/powerpoint/2010/main" val="2676631563"/>
+      </p:ext>
+    </p:extLst>
+  </p:cSld>
+  <p:clrMapOvr>
+    <a:masterClrMapping/>
+  </p:clrMapOvr>
+</p:sld>
+</file>
+
+<file path=ppt/slides/slide18.xml><?xml version="1.0" encoding="utf-8"?>
+<p:sld xmlns:a="http://schemas.openxmlformats.org/drawingml/2006/main" xmlns:r="http://schemas.openxmlformats.org/officeDocument/2006/relationships" xmlns:p="http://schemas.openxmlformats.org/presentationml/2006/main">
+  <p:cSld>
+    <p:spTree>
+      <p:nvGrpSpPr>
+        <p:cNvPr id="1" name="">
+          <a:extLst>
+            <a:ext uri="{FF2B5EF4-FFF2-40B4-BE49-F238E27FC236}">
+              <a16:creationId xmlns:a16="http://schemas.microsoft.com/office/drawing/2014/main" id="{143DE580-AF62-BA4D-F565-ED6C39A3362A}"/>
+            </a:ext>
+          </a:extLst>
+        </p:cNvPr>
+        <p:cNvGrpSpPr/>
+        <p:nvPr/>
+      </p:nvGrpSpPr>
+      <p:grpSpPr>
+        <a:xfrm>
+          <a:off x="0" y="0"/>
+          <a:ext cx="0" cy="0"/>
+          <a:chOff x="0" y="0"/>
+          <a:chExt cx="0" cy="0"/>
+        </a:xfrm>
+      </p:grpSpPr>
+      <p:sp>
+        <p:nvSpPr>
+          <p:cNvPr id="4" name="Title 3">
+            <a:extLst>
+              <a:ext uri="{FF2B5EF4-FFF2-40B4-BE49-F238E27FC236}">
+                <a16:creationId xmlns:a16="http://schemas.microsoft.com/office/drawing/2014/main" id="{60786B49-BFB8-0451-332D-463DB3BA9A8F}"/>
+              </a:ext>
+            </a:extLst>
+          </p:cNvPr>
+          <p:cNvSpPr>
+            <a:spLocks noGrp="1"/>
+          </p:cNvSpPr>
+          <p:nvPr>
+            <p:ph type="title"/>
+          </p:nvPr>
+        </p:nvSpPr>
+        <p:spPr>
+          <a:xfrm>
+            <a:off x="0" y="0"/>
+            <a:ext cx="6858000" cy="845820"/>
+          </a:xfrm>
+          <a:solidFill>
+            <a:schemeClr val="accent1"/>
+          </a:solidFill>
+        </p:spPr>
+        <p:txBody>
+          <a:bodyPr>
+            <a:normAutofit/>
+          </a:bodyPr>
+          <a:lstStyle/>
+          <a:p>
+            <a:pPr algn="ctr"/>
+            <a:r>
+              <a:rPr lang="en-US" sz="3100" b="1" dirty="0">
+                <a:solidFill>
+                  <a:schemeClr val="bg1"/>
+                </a:solidFill>
+              </a:rPr>
+              <a:t>THREAT-INFORMED-DEFENSE</a:t>
+            </a:r>
+          </a:p>
+        </p:txBody>
+      </p:sp>
+      <p:sp>
+        <p:nvSpPr>
+          <p:cNvPr id="2" name="TextBox 1">
+            <a:extLst>
+              <a:ext uri="{FF2B5EF4-FFF2-40B4-BE49-F238E27FC236}">
+                <a16:creationId xmlns:a16="http://schemas.microsoft.com/office/drawing/2014/main" id="{3EF24AC0-C047-EC19-7620-A1F2873F0D0D}"/>
+              </a:ext>
+            </a:extLst>
+          </p:cNvPr>
+          <p:cNvSpPr txBox="1"/>
+          <p:nvPr/>
+        </p:nvSpPr>
+        <p:spPr>
+          <a:xfrm>
+            <a:off x="0" y="845820"/>
+            <a:ext cx="6759615" cy="1754326"/>
+          </a:xfrm>
+          <a:prstGeom prst="rect">
+            <a:avLst/>
+          </a:prstGeom>
+          <a:noFill/>
+        </p:spPr>
+        <p:txBody>
+          <a:bodyPr wrap="square" rtlCol="0">
+            <a:spAutoFit/>
+          </a:bodyPr>
+          <a:lstStyle/>
+          <a:p>
+            <a:r>
+              <a:rPr lang="en-US" dirty="0"/>
+              <a:t>• What is the mission of my organization?</a:t>
+            </a:r>
+          </a:p>
+          <a:p>
+            <a:r>
+              <a:rPr lang="en-US" dirty="0"/>
+              <a:t>• What threat actors are interested in my organizations industry?</a:t>
+            </a:r>
+          </a:p>
+          <a:p>
+            <a:r>
+              <a:rPr lang="en-IN" dirty="0"/>
+              <a:t>• What are the motivations of those threat actors?</a:t>
+            </a:r>
+          </a:p>
+          <a:p>
+            <a:r>
+              <a:rPr lang="en-IN" dirty="0"/>
+              <a:t>• What TTPs are those threat actors are using?</a:t>
+            </a:r>
+          </a:p>
+          <a:p>
+            <a:r>
+              <a:rPr lang="en-IN" dirty="0"/>
+              <a:t>• How can I detect and protect any organization against those TTPs?</a:t>
+            </a:r>
+          </a:p>
+          <a:p>
+            <a:endParaRPr lang="en-IN" dirty="0"/>
+          </a:p>
+        </p:txBody>
+      </p:sp>
+      <p:sp>
+        <p:nvSpPr>
+          <p:cNvPr id="3" name="Title 3">
+            <a:extLst>
+              <a:ext uri="{FF2B5EF4-FFF2-40B4-BE49-F238E27FC236}">
+                <a16:creationId xmlns:a16="http://schemas.microsoft.com/office/drawing/2014/main" id="{364A4F1B-3B43-A426-25A3-C347A7E6FFCA}"/>
+              </a:ext>
+            </a:extLst>
+          </p:cNvPr>
+          <p:cNvSpPr txBox="1">
+            <a:spLocks/>
+          </p:cNvSpPr>
+          <p:nvPr/>
+        </p:nvSpPr>
+        <p:spPr>
+          <a:xfrm>
+            <a:off x="0" y="2450543"/>
+            <a:ext cx="6858000" cy="845820"/>
+          </a:xfrm>
+          <a:prstGeom prst="rect">
+            <a:avLst/>
+          </a:prstGeom>
+          <a:solidFill>
+            <a:schemeClr val="accent1"/>
+          </a:solidFill>
+        </p:spPr>
+        <p:txBody>
+          <a:bodyPr vert="horz" lIns="91440" tIns="45720" rIns="91440" bIns="45720" rtlCol="0" anchor="ctr">
+            <a:normAutofit/>
+          </a:bodyPr>
+          <a:lstStyle>
+            <a:lvl1pPr algn="l" defTabSz="685800" rtl="0" eaLnBrk="1" latinLnBrk="0" hangingPunct="1">
+              <a:lnSpc>
+                <a:spcPct val="90000"/>
+              </a:lnSpc>
+              <a:spcBef>
+                <a:spcPct val="0"/>
+              </a:spcBef>
+              <a:buNone/>
+              <a:defRPr sz="3300" kern="1200">
+                <a:solidFill>
+                  <a:schemeClr val="tx1"/>
+                </a:solidFill>
+                <a:latin typeface="+mj-lt"/>
+                <a:ea typeface="+mj-ea"/>
+                <a:cs typeface="+mj-cs"/>
+              </a:defRPr>
+            </a:lvl1pPr>
+          </a:lstStyle>
+          <a:p>
+            <a:pPr algn="ctr"/>
+            <a:r>
+              <a:rPr lang="en-US" sz="3100" b="1" dirty="0">
+                <a:solidFill>
+                  <a:schemeClr val="bg1"/>
+                </a:solidFill>
+              </a:rPr>
+              <a:t>Tactics, Techniques, and Procedures</a:t>
+            </a:r>
+          </a:p>
+        </p:txBody>
+      </p:sp>
+      <p:pic>
+        <p:nvPicPr>
+          <p:cNvPr id="9" name="Picture 8">
+            <a:extLst>
+              <a:ext uri="{FF2B5EF4-FFF2-40B4-BE49-F238E27FC236}">
+                <a16:creationId xmlns:a16="http://schemas.microsoft.com/office/drawing/2014/main" id="{0D2D0228-7725-E321-7BA0-4CA4B54688E9}"/>
+              </a:ext>
+            </a:extLst>
+          </p:cNvPr>
+          <p:cNvPicPr>
+            <a:picLocks noChangeAspect="1"/>
+          </p:cNvPicPr>
+          <p:nvPr/>
+        </p:nvPicPr>
+        <p:blipFill>
+          <a:blip r:embed="rId2"/>
+          <a:stretch>
+            <a:fillRect/>
+          </a:stretch>
+        </p:blipFill>
+        <p:spPr>
+          <a:xfrm>
+            <a:off x="164050" y="3370391"/>
+            <a:ext cx="6529899" cy="2278569"/>
+          </a:xfrm>
+          <a:prstGeom prst="rect">
+            <a:avLst/>
+          </a:prstGeom>
+        </p:spPr>
+      </p:pic>
+    </p:spTree>
+    <p:extLst>
+      <p:ext uri="{BB962C8B-B14F-4D97-AF65-F5344CB8AC3E}">
+        <p14:creationId xmlns:p14="http://schemas.microsoft.com/office/powerpoint/2010/main" val="615756037"/>
       </p:ext>
     </p:extLst>
   </p:cSld>
